--- a/sjoskolan/vecka-42/aktuell/v42_03_Riskbedomning_och_skydd_elev.pptx
+++ b/sjoskolan/vecka-42/aktuell/v42_03_Riskbedomning_och_skydd_elev.pptx
@@ -3512,6 +3512,10 @@
             <a:noFill/>
           </a:ln>
         </p:spPr>
+        <p:txBody xmlns:a="http://schemas.openxmlformats.org/drawingml/2006/main">
+          <a:bodyPr/>
+          <a:p/>
+        </p:txBody>
       </p:sp>
       <p:sp>
         <p:nvSpPr>
@@ -4348,7 +4352,7 @@
                 <a:ea typeface="Calibri"/>
                 <a:cs typeface="Calibri"/>
               </a:rPr>
-              <a:t>Redovisa din beräkning eller motivera ditt beslut.</a:t>
+              <a:t>Motivera ditt beslut.</a:t>
             </a:r>
           </a:p>
         </p:txBody>
@@ -4623,7 +4627,7 @@
                 <a:ea typeface="Calibri"/>
                 <a:cs typeface="Calibri"/>
               </a:rPr>
-              <a:t>Fara är exempelvis skadad isolation. Händelsen kan vara beröring. Konsekvensen kan vara strömgenomgång.</a:t>
+              <a:t>Fara är det som kan skada. Händelsen är det som kan inträffa. Konsekvensen är skadan som kan följa.</a:t>
             </a:r>
           </a:p>
         </p:txBody>
@@ -5072,7 +5076,7 @@
                 <a:ea typeface="Calibri"/>
                 <a:cs typeface="Calibri"/>
               </a:rPr>
-              <a:t>Redovisa din beräkning eller motivera ditt beslut.</a:t>
+              <a:t>Motivera ditt beslut.</a:t>
             </a:r>
           </a:p>
         </p:txBody>
@@ -5796,7 +5800,7 @@
                 <a:ea typeface="Calibri"/>
                 <a:cs typeface="Calibri"/>
               </a:rPr>
-              <a:t>Redovisa din beräkning eller motivera ditt beslut.</a:t>
+              <a:t>Motivera ditt beslut.</a:t>
             </a:r>
           </a:p>
         </p:txBody>
@@ -5979,7 +5983,7 @@
         <p:spPr>
           <a:xfrm xmlns:a="http://schemas.openxmlformats.org/drawingml/2006/main">
             <a:off x="762000" y="1638300"/>
-            <a:ext cx="7620000" cy="876300"/>
+            <a:ext cx="3977639" cy="876300"/>
           </a:xfrm>
           <a:prstGeom xmlns:a="http://schemas.openxmlformats.org/drawingml/2006/main" prst="rect">
             <a:avLst/>
@@ -6006,7 +6010,7 @@
               </a:defRPr>
             </a:pPr>
             <a:r>
-              <a:rPr sz="2400" b="1">
+              <a:rPr sz="1950" b="1">
                 <a:solidFill>
                   <a:srgbClr val="064F91"/>
                 </a:solidFill>
@@ -6014,7 +6018,7 @@
                 <a:ea typeface="Calibri"/>
                 <a:cs typeface="Calibri"/>
               </a:rPr>
-              <a:t>Märkning informerar, skydd mot tillkoppling ska fungera</a:t>
+              <a:t>Märkning informerar, skydd mot återinkoppling ska fungera</a:t>
             </a:r>
           </a:p>
         </p:txBody>
@@ -6036,7 +6040,7 @@
         <p:spPr>
           <a:xfrm xmlns:a="http://schemas.openxmlformats.org/drawingml/2006/main">
             <a:off x="762000" y="2667000"/>
-            <a:ext cx="7620000" cy="952500"/>
+            <a:ext cx="3977639" cy="952500"/>
           </a:xfrm>
           <a:prstGeom xmlns:a="http://schemas.openxmlformats.org/drawingml/2006/main" prst="rect">
             <a:avLst/>
@@ -6063,15 +6067,15 @@
               </a:defRPr>
             </a:pPr>
             <a:r>
-              <a:rPr sz="2100" b="0">
-                <a:solidFill>
-                  <a:srgbClr val="111111"/>
-                </a:solidFill>
-                <a:latin typeface="Calibri"/>
-                <a:ea typeface="Calibri"/>
-                <a:cs typeface="Calibri"/>
-              </a:rPr>
-              <a:t>En skylt visar ett budskap. Den hindrar inte automatiskt någon från att tillkoppla.</a:t>
+              <a:rPr sz="2050" b="0">
+                <a:solidFill>
+                  <a:srgbClr val="111111"/>
+                </a:solidFill>
+                <a:latin typeface="Calibri"/>
+                <a:ea typeface="Calibri"/>
+                <a:cs typeface="Calibri"/>
+              </a:rPr>
+              <a:t>En skylt visar ett budskap. Den hindrar inte automatiskt någon från att slå till.</a:t>
             </a:r>
           </a:p>
         </p:txBody>
@@ -6093,7 +6097,7 @@
         <p:spPr>
           <a:xfrm xmlns:a="http://schemas.openxmlformats.org/drawingml/2006/main">
             <a:off x="762000" y="3800475"/>
-            <a:ext cx="7620000" cy="981075"/>
+            <a:ext cx="3977639" cy="981075"/>
           </a:xfrm>
           <a:prstGeom xmlns:a="http://schemas.openxmlformats.org/drawingml/2006/main" prst="rect">
             <a:avLst/>
@@ -6120,7 +6124,7 @@
               </a:defRPr>
             </a:pPr>
             <a:r>
-              <a:rPr sz="2025" b="0">
+              <a:rPr sz="1600" b="0">
                 <a:solidFill>
                   <a:srgbClr val="111111"/>
                 </a:solidFill>
@@ -6150,7 +6154,7 @@
         <p:spPr>
           <a:xfrm xmlns:a="http://schemas.openxmlformats.org/drawingml/2006/main">
             <a:off x="762000" y="5010150"/>
-            <a:ext cx="7620000" cy="990600"/>
+            <a:ext cx="3977639" cy="990600"/>
           </a:xfrm>
           <a:prstGeom xmlns:a="http://schemas.openxmlformats.org/drawingml/2006/main" prst="rect">
             <a:avLst/>
@@ -6177,7 +6181,7 @@
               </a:defRPr>
             </a:pPr>
             <a:r>
-              <a:rPr sz="2025" b="0">
+              <a:rPr sz="1850" b="0">
                 <a:solidFill>
                   <a:srgbClr val="111111"/>
                 </a:solidFill>
@@ -6247,6 +6251,30 @@
           </a:p>
         </p:txBody>
       </p:sp>
+      <p:pic xmlns:a="http://schemas.openxmlformats.org/drawingml/2006/main" xmlns:r="http://schemas.openxmlformats.org/officeDocument/2006/relationships">
+        <p:nvPicPr>
+          <p:cNvPr id="16" name="Figur: Brytare med bara en skylt ”Arbete pågår”" descr="Brytare med bara en skylt ”Arbete pågår” och frågan om skylten hindrar återinkoppling"/>
+          <p:cNvPicPr>
+            <a:picLocks noChangeAspect="1"/>
+          </p:cNvPicPr>
+          <p:nvPr/>
+        </p:nvPicPr>
+        <p:blipFill>
+          <a:blip r:embed="rId3"/>
+          <a:stretch>
+            <a:fillRect/>
+          </a:stretch>
+        </p:blipFill>
+        <p:spPr>
+          <a:xfrm>
+            <a:off x="4892040" y="1645920"/>
+            <a:ext cx="3886200" cy="3071293"/>
+          </a:xfrm>
+          <a:prstGeom prst="rect">
+            <a:avLst/>
+          </a:prstGeom>
+        </p:spPr>
+      </p:pic>
     </p:spTree>
     <p:extLst>
       <p:ext uri="{BB962C8B-B14F-4D97-AF65-F5344CB8AC3E}">
@@ -6520,7 +6548,7 @@
                 <a:ea typeface="Calibri"/>
                 <a:cs typeface="Calibri"/>
               </a:rPr>
-              <a:t>Redovisa din beräkning eller motivera ditt beslut.</a:t>
+              <a:t>Motivera ditt beslut.</a:t>
             </a:r>
           </a:p>
         </p:txBody>
@@ -7244,7 +7272,7 @@
                 <a:ea typeface="Calibri"/>
                 <a:cs typeface="Calibri"/>
               </a:rPr>
-              <a:t>Redovisa din beräkning eller motivera ditt beslut.</a:t>
+              <a:t>Motivera ditt beslut.</a:t>
             </a:r>
           </a:p>
         </p:txBody>
@@ -8172,7 +8200,7 @@
         <p:spPr>
           <a:xfrm xmlns:a="http://schemas.openxmlformats.org/drawingml/2006/main">
             <a:off x="762000" y="1619250"/>
-            <a:ext cx="7620000" cy="1466850"/>
+            <a:ext cx="3977639" cy="1466850"/>
           </a:xfrm>
           <a:prstGeom xmlns:a="http://schemas.openxmlformats.org/drawingml/2006/main" prst="rect">
             <a:avLst/>
@@ -8200,7 +8228,7 @@
               </a:defRPr>
             </a:pPr>
             <a:r>
-              <a:rPr sz="2400" b="0">
+              <a:rPr sz="1950" b="0">
                 <a:solidFill>
                   <a:srgbClr val="111111"/>
                 </a:solidFill>
@@ -8224,7 +8252,7 @@
               </a:defRPr>
             </a:pPr>
             <a:r>
-              <a:rPr sz="2400" b="0">
+              <a:rPr sz="1950" b="0">
                 <a:solidFill>
                   <a:srgbClr val="111111"/>
                 </a:solidFill>
@@ -8254,7 +8282,7 @@
         <p:spPr>
           <a:xfrm xmlns:a="http://schemas.openxmlformats.org/drawingml/2006/main">
             <a:off x="762000" y="3200400"/>
-            <a:ext cx="7620000" cy="838200"/>
+            <a:ext cx="3977639" cy="838200"/>
           </a:xfrm>
           <a:prstGeom xmlns:a="http://schemas.openxmlformats.org/drawingml/2006/main" prst="rect">
             <a:avLst/>
@@ -8282,7 +8310,7 @@
               </a:defRPr>
             </a:pPr>
             <a:r>
-              <a:rPr sz="2925" b="1">
+              <a:rPr sz="2300" b="1">
                 <a:solidFill>
                   <a:srgbClr val="064F91"/>
                 </a:solidFill>
@@ -8312,7 +8340,7 @@
         <p:spPr>
           <a:xfrm xmlns:a="http://schemas.openxmlformats.org/drawingml/2006/main">
             <a:off x="762000" y="4429125"/>
-            <a:ext cx="7620000" cy="1352550"/>
+            <a:ext cx="3977639" cy="1352550"/>
           </a:xfrm>
           <a:prstGeom xmlns:a="http://schemas.openxmlformats.org/drawingml/2006/main" prst="rect">
             <a:avLst/>
@@ -8340,7 +8368,7 @@
               </a:defRPr>
             </a:pPr>
             <a:r>
-              <a:rPr sz="2250" b="0">
+              <a:rPr sz="1800" b="0">
                 <a:solidFill>
                   <a:srgbClr val="111111"/>
                 </a:solidFill>
@@ -8364,7 +8392,7 @@
               </a:defRPr>
             </a:pPr>
             <a:r>
-              <a:rPr sz="2250" b="0">
+              <a:rPr sz="1800" b="0">
                 <a:solidFill>
                   <a:srgbClr val="111111"/>
                 </a:solidFill>
@@ -8435,6 +8463,30 @@
           </a:p>
         </p:txBody>
       </p:sp>
+      <p:pic xmlns:a="http://schemas.openxmlformats.org/drawingml/2006/main" xmlns:r="http://schemas.openxmlformats.org/officeDocument/2006/relationships">
+        <p:nvPicPr>
+          <p:cNvPr id="9" name="Figur: Tre faser frånskilda; jordning och korts" descr="Tre faser frånskilda; jordning och kortslutning nära arbetsstället och synlig därifrån"/>
+          <p:cNvPicPr>
+            <a:picLocks noChangeAspect="1"/>
+          </p:cNvPicPr>
+          <p:nvPr/>
+        </p:nvPicPr>
+        <p:blipFill>
+          <a:blip r:embed="rId3"/>
+          <a:stretch>
+            <a:fillRect/>
+          </a:stretch>
+        </p:blipFill>
+        <p:spPr>
+          <a:xfrm>
+            <a:off x="4892040" y="1645920"/>
+            <a:ext cx="3886200" cy="3252383"/>
+          </a:xfrm>
+          <a:prstGeom prst="rect">
+            <a:avLst/>
+          </a:prstGeom>
+        </p:spPr>
+      </p:pic>
     </p:spTree>
     <p:extLst>
       <p:ext uri="{BB962C8B-B14F-4D97-AF65-F5344CB8AC3E}">
@@ -9323,7 +9375,7 @@
         <p:spPr>
           <a:xfrm xmlns:a="http://schemas.openxmlformats.org/drawingml/2006/main">
             <a:off x="762000" y="1571625"/>
-            <a:ext cx="7620000" cy="990600"/>
+            <a:ext cx="3977639" cy="990600"/>
           </a:xfrm>
           <a:prstGeom xmlns:a="http://schemas.openxmlformats.org/drawingml/2006/main" prst="rect">
             <a:avLst/>
@@ -9350,15 +9402,15 @@
               </a:defRPr>
             </a:pPr>
             <a:r>
-              <a:rPr sz="2175" b="0">
-                <a:solidFill>
-                  <a:srgbClr val="111111"/>
-                </a:solidFill>
-                <a:latin typeface="Calibri"/>
-                <a:ea typeface="Calibri"/>
-                <a:cs typeface="Calibri"/>
-              </a:rPr>
-              <a:t>En övningsmatris anger sannolikhet 4, konsekvens 3. Efter åtgärd bedöms sannolikheten till 2.</a:t>
+              <a:rPr sz="1800" b="0">
+                <a:solidFill>
+                  <a:srgbClr val="111111"/>
+                </a:solidFill>
+                <a:latin typeface="Calibri"/>
+                <a:ea typeface="Calibri"/>
+                <a:cs typeface="Calibri"/>
+              </a:rPr>
+              <a:t>En övningsmatris anger sannolikhet 4, konsekvens 2. Efter åtgärd bedöms sannolikheten till 2.</a:t>
             </a:r>
           </a:p>
         </p:txBody>
@@ -9380,7 +9432,7 @@
         <p:spPr>
           <a:xfrm xmlns:a="http://schemas.openxmlformats.org/drawingml/2006/main">
             <a:off x="762000" y="2705100"/>
-            <a:ext cx="7620000" cy="790575"/>
+            <a:ext cx="3977639" cy="790575"/>
           </a:xfrm>
           <a:prstGeom xmlns:a="http://schemas.openxmlformats.org/drawingml/2006/main" prst="rect">
             <a:avLst/>
@@ -9415,7 +9467,7 @@
                 <a:ea typeface="Calibri"/>
                 <a:cs typeface="Calibri"/>
               </a:rPr>
-              <a:t>Riskpoäng = sannolikhet · konsekvens</a:t>
+              <a:t>Riskpoäng = sannolikhet · konsekvens</a:t>
             </a:r>
           </a:p>
         </p:txBody>
@@ -9437,7 +9489,7 @@
         <p:spPr>
           <a:xfrm xmlns:a="http://schemas.openxmlformats.org/drawingml/2006/main">
             <a:off x="762000" y="3657600"/>
-            <a:ext cx="7620000" cy="1524000"/>
+            <a:ext cx="3977639" cy="1524000"/>
           </a:xfrm>
           <a:prstGeom xmlns:a="http://schemas.openxmlformats.org/drawingml/2006/main" prst="rect">
             <a:avLst/>
@@ -9464,15 +9516,15 @@
               </a:defRPr>
             </a:pPr>
             <a:r>
-              <a:rPr sz="2063" b="0">
-                <a:solidFill>
-                  <a:srgbClr val="111111"/>
-                </a:solidFill>
-                <a:latin typeface="Calibri"/>
-                <a:ea typeface="Calibri"/>
-                <a:cs typeface="Calibri"/>
-              </a:rPr>
-              <a:t>1. Före: 4 · 3 = 12.</a:t>
+              <a:rPr sz="1950" b="0">
+                <a:solidFill>
+                  <a:srgbClr val="111111"/>
+                </a:solidFill>
+                <a:latin typeface="Calibri"/>
+                <a:ea typeface="Calibri"/>
+                <a:cs typeface="Calibri"/>
+              </a:rPr>
+              <a:t>1. Före: 4 · 2 = 8.</a:t>
             </a:r>
           </a:p>
           <a:p xmlns:a="http://schemas.openxmlformats.org/drawingml/2006/main">
@@ -9487,15 +9539,15 @@
               </a:defRPr>
             </a:pPr>
             <a:r>
-              <a:rPr sz="2063" b="0">
-                <a:solidFill>
-                  <a:srgbClr val="111111"/>
-                </a:solidFill>
-                <a:latin typeface="Calibri"/>
-                <a:ea typeface="Calibri"/>
-                <a:cs typeface="Calibri"/>
-              </a:rPr>
-              <a:t>2. Efter: 2 · 3 = 6.</a:t>
+              <a:rPr sz="1950" b="0">
+                <a:solidFill>
+                  <a:srgbClr val="111111"/>
+                </a:solidFill>
+                <a:latin typeface="Calibri"/>
+                <a:ea typeface="Calibri"/>
+                <a:cs typeface="Calibri"/>
+              </a:rPr>
+              <a:t>2. Efter: 2 · 2 = 4.</a:t>
             </a:r>
           </a:p>
           <a:p xmlns:a="http://schemas.openxmlformats.org/drawingml/2006/main">
@@ -9510,15 +9562,15 @@
               </a:defRPr>
             </a:pPr>
             <a:r>
-              <a:rPr sz="2063" b="0">
-                <a:solidFill>
-                  <a:srgbClr val="111111"/>
-                </a:solidFill>
-                <a:latin typeface="Calibri"/>
-                <a:ea typeface="Calibri"/>
-                <a:cs typeface="Calibri"/>
-              </a:rPr>
-              <a:t>3. Poängen har halverats inom just denna skala.</a:t>
+              <a:rPr sz="1950" b="0">
+                <a:solidFill>
+                  <a:srgbClr val="111111"/>
+                </a:solidFill>
+                <a:latin typeface="Calibri"/>
+                <a:ea typeface="Calibri"/>
+                <a:cs typeface="Calibri"/>
+              </a:rPr>
+              <a:t>3. Poängen sjunker i denna matris. Det betyder inte att risken har halverats.</a:t>
             </a:r>
           </a:p>
         </p:txBody>
@@ -9540,7 +9592,7 @@
         <p:spPr>
           <a:xfrm xmlns:a="http://schemas.openxmlformats.org/drawingml/2006/main">
             <a:off x="762000" y="5372100"/>
-            <a:ext cx="7620000" cy="685800"/>
+            <a:ext cx="3977639" cy="685800"/>
           </a:xfrm>
           <a:prstGeom xmlns:a="http://schemas.openxmlformats.org/drawingml/2006/main" prst="rect">
             <a:avLst/>
@@ -9567,7 +9619,7 @@
               </a:defRPr>
             </a:pPr>
             <a:r>
-              <a:rPr sz="1913" b="0">
+              <a:rPr sz="1550" b="0">
                 <a:solidFill>
                   <a:srgbClr val="111111"/>
                 </a:solidFill>
@@ -9637,6 +9689,30 @@
           </a:p>
         </p:txBody>
       </p:sp>
+      <p:pic xmlns:a="http://schemas.openxmlformats.org/drawingml/2006/main" xmlns:r="http://schemas.openxmlformats.org/officeDocument/2006/relationships">
+        <p:nvPicPr>
+          <p:cNvPr id="16" name="Figur: Riskmatris fem gånger fem med poäng; för" descr="Riskmatris fem gånger fem med poäng; före åtgärd sannolikhet 4 och konsekvens 2, efter åtgärd 2 och 2"/>
+          <p:cNvPicPr>
+            <a:picLocks noChangeAspect="1"/>
+          </p:cNvPicPr>
+          <p:nvPr/>
+        </p:nvPicPr>
+        <p:blipFill>
+          <a:blip r:embed="rId3"/>
+          <a:stretch>
+            <a:fillRect/>
+          </a:stretch>
+        </p:blipFill>
+        <p:spPr>
+          <a:xfrm>
+            <a:off x="4892040" y="1645920"/>
+            <a:ext cx="3886200" cy="3886200"/>
+          </a:xfrm>
+          <a:prstGeom prst="rect">
+            <a:avLst/>
+          </a:prstGeom>
+        </p:spPr>
+      </p:pic>
     </p:spTree>
     <p:extLst>
       <p:ext uri="{BB962C8B-B14F-4D97-AF65-F5344CB8AC3E}">
@@ -10298,7 +10374,7 @@
                 <a:ea typeface="Calibri"/>
                 <a:cs typeface="Calibri"/>
               </a:rPr>
-              <a:t>Redovisa din beräkning eller motivera ditt beslut.</a:t>
+              <a:t>Motivera ditt beslut.</a:t>
             </a:r>
           </a:p>
         </p:txBody>
@@ -11022,7 +11098,7 @@
                 <a:ea typeface="Calibri"/>
                 <a:cs typeface="Calibri"/>
               </a:rPr>
-              <a:t>Redovisa din beräkning eller motivera ditt beslut.</a:t>
+              <a:t>Motivera ditt beslut.</a:t>
             </a:r>
           </a:p>
         </p:txBody>
@@ -12984,7 +13060,7 @@
                 <a:ea typeface="Calibri"/>
                 <a:cs typeface="Calibri"/>
               </a:rPr>
-              <a:t>Redovisa din beräkning eller motivera ditt beslut.</a:t>
+              <a:t>Motivera ditt beslut.</a:t>
             </a:r>
           </a:p>
         </p:txBody>
@@ -13259,7 +13335,7 @@
                 <a:ea typeface="Calibri"/>
                 <a:cs typeface="Calibri"/>
               </a:rPr>
-              <a:t>Tillgänglig skyddsutrustning löser inte oklar energitillförsel till arbetsområdet.</a:t>
+              <a:t>Jämför det som är verifierat med det som den valda arbetsmetoden kräver.</a:t>
             </a:r>
           </a:p>
         </p:txBody>
@@ -13708,7 +13784,7 @@
                 <a:ea typeface="Calibri"/>
                 <a:cs typeface="Calibri"/>
               </a:rPr>
-              <a:t>Redovisa din beräkning eller motivera ditt beslut.</a:t>
+              <a:t>Motivera ditt beslut.</a:t>
             </a:r>
           </a:p>
         </p:txBody>
@@ -14414,64 +14490,6 @@
       </p:sp>
       <p:sp>
         <p:nvSpPr>
-          <p:cNvPr id="7" name="Källor och lärarstöd finns även i bildanteckningarna.">
-            <a:extLst xmlns:a="http://schemas.openxmlformats.org/drawingml/2006/main">
-              <a:ext uri="{FF2B5EF4-FFF2-40B4-BE49-F238E27FC236}">
-                <a16:creationId xmlns:a16="http://schemas.microsoft.com/office/drawing/2014/main" id="{248C450B-1882-44C4-B54D-206A6A6302FB}"/>
-              </a:ext>
-            </a:extLst>
-          </p:cNvPr>
-          <p:cNvSpPr>
-            <a:spLocks xmlns:a="http://schemas.openxmlformats.org/drawingml/2006/main" noGrp="1"/>
-          </p:cNvSpPr>
-          <p:nvPr/>
-        </p:nvSpPr>
-        <p:spPr>
-          <a:xfrm xmlns:a="http://schemas.openxmlformats.org/drawingml/2006/main">
-            <a:off x="762000" y="5676900"/>
-            <a:ext cx="7620000" cy="352425"/>
-          </a:xfrm>
-          <a:prstGeom xmlns:a="http://schemas.openxmlformats.org/drawingml/2006/main" prst="rect">
-            <a:avLst/>
-          </a:prstGeom>
-          <a:noFill xmlns:a="http://schemas.openxmlformats.org/drawingml/2006/main"/>
-          <a:ln xmlns:a="http://schemas.openxmlformats.org/drawingml/2006/main" w="0">
-            <a:noFill/>
-          </a:ln>
-        </p:spPr>
-        <p:txBody>
-          <a:bodyPr xmlns:a="http://schemas.openxmlformats.org/drawingml/2006/main" wrap="square" lIns="0" tIns="0" rIns="0" bIns="0" anchor="t">
-            <a:noAutofit/>
-          </a:bodyPr>
-          <a:lstStyle xmlns:a="http://schemas.openxmlformats.org/drawingml/2006/main"/>
-          <a:p xmlns:a="http://schemas.openxmlformats.org/drawingml/2006/main">
-            <a:pPr algn="l">
-              <a:buNone/>
-              <a:defRPr sz="1800" b="0">
-                <a:solidFill>
-                  <a:srgbClr val="111111"/>
-                </a:solidFill>
-                <a:latin typeface="Calibri"/>
-                <a:ea typeface="Calibri"/>
-                <a:cs typeface="Calibri"/>
-              </a:defRPr>
-            </a:pPr>
-            <a:r>
-              <a:rPr sz="1800" b="0">
-                <a:solidFill>
-                  <a:srgbClr val="111111"/>
-                </a:solidFill>
-                <a:latin typeface="Calibri"/>
-                <a:ea typeface="Calibri"/>
-                <a:cs typeface="Calibri"/>
-              </a:rPr>
-              <a:t>Källor och lärarstöd finns även i bildanteckningarna.</a:t>
-            </a:r>
-          </a:p>
-        </p:txBody>
-      </p:sp>
-      <p:sp>
-        <p:nvSpPr>
           <p:cNvPr id="8" name="22">
             <a:extLst xmlns:a="http://schemas.openxmlformats.org/drawingml/2006/main">
               <a:ext uri="{FF2B5EF4-FFF2-40B4-BE49-F238E27FC236}">
@@ -15946,7 +15964,7 @@
         <p:spPr>
           <a:xfrm xmlns:a="http://schemas.openxmlformats.org/drawingml/2006/main">
             <a:off x="762000" y="1619250"/>
-            <a:ext cx="7620000" cy="1466850"/>
+            <a:ext cx="3977639" cy="1466850"/>
           </a:xfrm>
           <a:prstGeom xmlns:a="http://schemas.openxmlformats.org/drawingml/2006/main" prst="rect">
             <a:avLst/>
@@ -15974,7 +15992,7 @@
               </a:defRPr>
             </a:pPr>
             <a:r>
-              <a:rPr sz="2400" b="0">
+              <a:rPr sz="1900" b="0">
                 <a:solidFill>
                   <a:srgbClr val="111111"/>
                 </a:solidFill>
@@ -15998,7 +16016,7 @@
               </a:defRPr>
             </a:pPr>
             <a:r>
-              <a:rPr sz="2400" b="0">
+              <a:rPr sz="1900" b="0">
                 <a:solidFill>
                   <a:srgbClr val="111111"/>
                 </a:solidFill>
@@ -16028,7 +16046,7 @@
         <p:spPr>
           <a:xfrm xmlns:a="http://schemas.openxmlformats.org/drawingml/2006/main">
             <a:off x="762000" y="3200400"/>
-            <a:ext cx="7620000" cy="838200"/>
+            <a:ext cx="3977639" cy="838200"/>
           </a:xfrm>
           <a:prstGeom xmlns:a="http://schemas.openxmlformats.org/drawingml/2006/main" prst="rect">
             <a:avLst/>
@@ -16056,7 +16074,7 @@
               </a:defRPr>
             </a:pPr>
             <a:r>
-              <a:rPr sz="2925" b="1">
+              <a:rPr sz="2500" b="1">
                 <a:solidFill>
                   <a:srgbClr val="064F91"/>
                 </a:solidFill>
@@ -16086,7 +16104,7 @@
         <p:spPr>
           <a:xfrm xmlns:a="http://schemas.openxmlformats.org/drawingml/2006/main">
             <a:off x="762000" y="4429125"/>
-            <a:ext cx="7620000" cy="1352550"/>
+            <a:ext cx="3977639" cy="1352550"/>
           </a:xfrm>
           <a:prstGeom xmlns:a="http://schemas.openxmlformats.org/drawingml/2006/main" prst="rect">
             <a:avLst/>
@@ -16114,7 +16132,7 @@
               </a:defRPr>
             </a:pPr>
             <a:r>
-              <a:rPr sz="2250" b="0">
+              <a:rPr sz="1700" b="0">
                 <a:solidFill>
                   <a:srgbClr val="111111"/>
                 </a:solidFill>
@@ -16138,7 +16156,7 @@
               </a:defRPr>
             </a:pPr>
             <a:r>
-              <a:rPr sz="2250" b="0">
+              <a:rPr sz="1700" b="0">
                 <a:solidFill>
                   <a:srgbClr val="111111"/>
                 </a:solidFill>
@@ -16209,6 +16227,30 @@
           </a:p>
         </p:txBody>
       </p:sp>
+      <p:pic xmlns:a="http://schemas.openxmlformats.org/drawingml/2006/main" xmlns:r="http://schemas.openxmlformats.org/officeDocument/2006/relationships">
+        <p:nvPicPr>
+          <p:cNvPr id="9" name="Figur: Skyddsåtgärder i prioritetsordning: ta b" descr="Skyddsåtgärder i prioritetsordning: ta bort faran, ersätt, tekniska skydd, organisatoriska åtgärder, personlig skyddsutrustning"/>
+          <p:cNvPicPr>
+            <a:picLocks noChangeAspect="1"/>
+          </p:cNvPicPr>
+          <p:nvPr/>
+        </p:nvPicPr>
+        <p:blipFill>
+          <a:blip r:embed="rId3"/>
+          <a:stretch>
+            <a:fillRect/>
+          </a:stretch>
+        </p:blipFill>
+        <p:spPr>
+          <a:xfrm>
+            <a:off x="4892040" y="1645920"/>
+            <a:ext cx="3886200" cy="3795655"/>
+          </a:xfrm>
+          <a:prstGeom prst="rect">
+            <a:avLst/>
+          </a:prstGeom>
+        </p:spPr>
+      </p:pic>
     </p:spTree>
     <p:extLst>
       <p:ext uri="{BB962C8B-B14F-4D97-AF65-F5344CB8AC3E}">
@@ -16330,7 +16372,7 @@
         <p:spPr>
           <a:xfrm xmlns:a="http://schemas.openxmlformats.org/drawingml/2006/main">
             <a:off x="762000" y="1619250"/>
-            <a:ext cx="7620000" cy="1466850"/>
+            <a:ext cx="3977639" cy="1466850"/>
           </a:xfrm>
           <a:prstGeom xmlns:a="http://schemas.openxmlformats.org/drawingml/2006/main" prst="rect">
             <a:avLst/>
@@ -16358,15 +16400,15 @@
               </a:defRPr>
             </a:pPr>
             <a:r>
-              <a:rPr sz="2400" b="0">
-                <a:solidFill>
-                  <a:srgbClr val="111111"/>
-                </a:solidFill>
-                <a:latin typeface="Calibri"/>
-                <a:ea typeface="Calibri"/>
-                <a:cs typeface="Calibri"/>
-              </a:rPr>
-              <a:t>Spänningsprovare väljs för systemet och den avsedda kontrollen.</a:t>
+              <a:rPr sz="1800" b="0">
+                <a:solidFill>
+                  <a:srgbClr val="111111"/>
+                </a:solidFill>
+                <a:latin typeface="Calibri"/>
+                <a:ea typeface="Calibri"/>
+                <a:cs typeface="Calibri"/>
+              </a:rPr>
+              <a:t>Tvåpolig spänningsprovare väljs för systemets spänning och kategori.</a:t>
             </a:r>
           </a:p>
           <a:p xmlns:a="http://schemas.openxmlformats.org/drawingml/2006/main">
@@ -16382,7 +16424,7 @@
               </a:defRPr>
             </a:pPr>
             <a:r>
-              <a:rPr sz="2400" b="0">
+              <a:rPr sz="1800" b="0">
                 <a:solidFill>
                   <a:srgbClr val="111111"/>
                 </a:solidFill>
@@ -16412,7 +16454,7 @@
         <p:spPr>
           <a:xfrm xmlns:a="http://schemas.openxmlformats.org/drawingml/2006/main">
             <a:off x="762000" y="3200400"/>
-            <a:ext cx="7620000" cy="838200"/>
+            <a:ext cx="3977639" cy="838200"/>
           </a:xfrm>
           <a:prstGeom xmlns:a="http://schemas.openxmlformats.org/drawingml/2006/main" prst="rect">
             <a:avLst/>
@@ -16440,7 +16482,7 @@
               </a:defRPr>
             </a:pPr>
             <a:r>
-              <a:rPr sz="2925" b="1">
+              <a:rPr sz="2400" b="1">
                 <a:solidFill>
                   <a:srgbClr val="064F91"/>
                 </a:solidFill>
@@ -16470,7 +16512,7 @@
         <p:spPr>
           <a:xfrm xmlns:a="http://schemas.openxmlformats.org/drawingml/2006/main">
             <a:off x="762000" y="4429125"/>
-            <a:ext cx="7620000" cy="1352550"/>
+            <a:ext cx="3977639" cy="1352550"/>
           </a:xfrm>
           <a:prstGeom xmlns:a="http://schemas.openxmlformats.org/drawingml/2006/main" prst="rect">
             <a:avLst/>
@@ -16498,7 +16540,7 @@
               </a:defRPr>
             </a:pPr>
             <a:r>
-              <a:rPr sz="2250" b="0">
+              <a:rPr sz="2050" b="0">
                 <a:solidFill>
                   <a:srgbClr val="111111"/>
                 </a:solidFill>
@@ -16522,7 +16564,7 @@
               </a:defRPr>
             </a:pPr>
             <a:r>
-              <a:rPr sz="2250" b="0">
+              <a:rPr sz="2050" b="0">
                 <a:solidFill>
                   <a:srgbClr val="111111"/>
                 </a:solidFill>
@@ -16593,6 +16635,30 @@
           </a:p>
         </p:txBody>
       </p:sp>
+      <p:pic xmlns:a="http://schemas.openxmlformats.org/drawingml/2006/main" xmlns:r="http://schemas.openxmlformats.org/officeDocument/2006/relationships">
+        <p:nvPicPr>
+          <p:cNvPr id="9" name="Figur: Prova, mät, prova: spänningsprovaren kon" descr="Prova, mät, prova: spänningsprovaren kontrolleras mot känd källa före och efter mätningen på objektet"/>
+          <p:cNvPicPr>
+            <a:picLocks noChangeAspect="1"/>
+          </p:cNvPicPr>
+          <p:nvPr/>
+        </p:nvPicPr>
+        <p:blipFill>
+          <a:blip r:embed="rId3"/>
+          <a:stretch>
+            <a:fillRect/>
+          </a:stretch>
+        </p:blipFill>
+        <p:spPr>
+          <a:xfrm>
+            <a:off x="4892040" y="1645920"/>
+            <a:ext cx="3886200" cy="3071293"/>
+          </a:xfrm>
+          <a:prstGeom prst="rect">
+            <a:avLst/>
+          </a:prstGeom>
+        </p:spPr>
+      </p:pic>
     </p:spTree>
     <p:extLst>
       <p:ext uri="{BB962C8B-B14F-4D97-AF65-F5344CB8AC3E}">

--- a/sjoskolan/vecka-42/aktuell/v42_03_Riskbedomning_och_skydd_elev.pptx
+++ b/sjoskolan/vecka-42/aktuell/v42_03_Riskbedomning_och_skydd_elev.pptx
@@ -3903,7 +3903,7 @@
                 <a:ea typeface="Calibri"/>
                 <a:cs typeface="Calibri"/>
               </a:rPr>
-              <a:t>Rumsnamn visar plats men avgränsar inte vilka ledare, anslutningar och matningsvägar som berörs.</a:t>
+              <a:t>Ett rum anger en plats, men inte vilka ledare, anslutningar och matningar som berörs.</a:t>
             </a:r>
           </a:p>
         </p:txBody>
@@ -3960,7 +3960,7 @@
                 <a:ea typeface="Calibri"/>
                 <a:cs typeface="Calibri"/>
               </a:rPr>
-              <a:t>Förutsättningar: Arbete gäller kopplingslåda K2 i maskinrummet. Inga närmare anslutningar är angivna.</a:t>
+              <a:t>Förutsättningar: Arbetet gäller kopplingslådan K2 i maskinrummet. Inga anslutningar är angivna.</a:t>
             </a:r>
           </a:p>
         </p:txBody>
@@ -4017,7 +4017,7 @@
                 <a:ea typeface="Calibri"/>
                 <a:cs typeface="Calibri"/>
               </a:rPr>
-              <a:t>Arbetsgång: Ange objekt-ID, delar som ingår, matningar och närliggande riskkällor som behöver klarläggas.</a:t>
+              <a:t>Arbetsgång: Ange vad som behöver klargöras: exakt vilken apparat, vilka delar som ingår, matningar och risker i närheten.</a:t>
             </a:r>
           </a:p>
         </p:txBody>
@@ -4294,7 +4294,7 @@
                 <a:ea typeface="Calibri"/>
                 <a:cs typeface="Calibri"/>
               </a:rPr>
-              <a:t>Uppgiften är att undersöka kopplingslåda K2. Underlaget säger bara ”i maskinrummet”. Vad behöver preciseras?</a:t>
+              <a:t>Uppgiften är att undersöka kopplingslådan K2. Underlaget säger bara ”i maskinrummet”. Vad behöver du veta mer exakt?</a:t>
             </a:r>
           </a:p>
         </p:txBody>
@@ -4684,7 +4684,7 @@
                 <a:ea typeface="Calibri"/>
                 <a:cs typeface="Calibri"/>
               </a:rPr>
-              <a:t>Förutsättningar: Kabel med synlig skada i våt miljö. Verklig spänningssättning är inte verifierad.</a:t>
+              <a:t>Förutsättningar: En kabel med synlig skada i våt miljö. Ingen har kontrollerat om den är spänningssatt.</a:t>
             </a:r>
           </a:p>
         </p:txBody>
@@ -5351,7 +5351,7 @@
                 <a:ea typeface="Calibri"/>
                 <a:cs typeface="Calibri"/>
               </a:rPr>
-              <a:t>Personlig skyddsutrustning kompletterar åtgärder som minskar faran och exponeringen.</a:t>
+              <a:t>Personlig skyddsutrustning är ett komplement till åtgärder som minskar faran.</a:t>
             </a:r>
           </a:p>
         </p:txBody>
@@ -5408,7 +5408,7 @@
                 <a:ea typeface="Calibri"/>
                 <a:cs typeface="Calibri"/>
               </a:rPr>
-              <a:t>Förutsättningar: Riskraden anger bara ”risk för elchock, använd handskar”. Klassning, arbetsmetod och ansvar saknas.</a:t>
+              <a:t>Förutsättningar: Riskraden säger bara ”risk för elchock, använd handskar”. Det står inget om klassning, arbetsmetod eller ansvar.</a:t>
             </a:r>
           </a:p>
         </p:txBody>
@@ -5465,7 +5465,7 @@
                 <a:ea typeface="Calibri"/>
                 <a:cs typeface="Calibri"/>
               </a:rPr>
-              <a:t>Arbetsgång: Förklara vad som saknas för att bedöma skyddets effekt. Vanliga handskar har inget givet elektriskt skydd.</a:t>
+              <a:t>Arbetsgång: Förklara vad som saknas för att kunna bedöma om skyddet räcker. Vanliga arbetshandskar skyddar inte mot el.</a:t>
             </a:r>
           </a:p>
         </p:txBody>
@@ -5684,7 +5684,7 @@
                 <a:ea typeface="Calibri"/>
                 <a:cs typeface="Calibri"/>
               </a:rPr>
-              <a:t>PPE som enda åtgärd</a:t>
+              <a:t>Skyddsutrustning som enda åtgärd</a:t>
             </a:r>
           </a:p>
         </p:txBody>
@@ -5742,7 +5742,7 @@
                 <a:ea typeface="Calibri"/>
                 <a:cs typeface="Calibri"/>
               </a:rPr>
-              <a:t>Riskraden säger ”risk för elchock, använd handskar”. Varför är den otillräcklig?</a:t>
+              <a:t>Riskraden säger ”risk för elchock, använd handskar”. Varför räcker det inte?</a:t>
             </a:r>
           </a:p>
         </p:txBody>
@@ -6132,7 +6132,7 @@
                 <a:ea typeface="Calibri"/>
                 <a:cs typeface="Calibri"/>
               </a:rPr>
-              <a:t>Förutsättningar: Arbetsplanens skydd mot återinkoppling är inte genomfört eller verifierat. Endast en skylt finns.</a:t>
+              <a:t>Förutsättningar: Skyddet mot återinkoppling i arbetsplanen är inte genomfört. Det finns bara en skylt.</a:t>
             </a:r>
           </a:p>
         </p:txBody>
@@ -6490,7 +6490,7 @@
                 <a:ea typeface="Calibri"/>
                 <a:cs typeface="Calibri"/>
               </a:rPr>
-              <a:t>En skylt finns på en brytare men återinkoppling är inte förhindrad enligt arbetsplanen. Är skylten ensam tillräcklig?</a:t>
+              <a:t>Det sitter en skylt på en brytare, men inget hindrar att den slås till igen. Räcker skylten?</a:t>
             </a:r>
           </a:p>
         </p:txBody>
@@ -6823,7 +6823,7 @@
                 <a:ea typeface="Calibri"/>
                 <a:cs typeface="Calibri"/>
               </a:rPr>
-              <a:t>Mätledningar och isolering ingår i provarens funktion och skydd.</a:t>
+              <a:t>Mätsladdarna och deras isolering är en del av provarens funktion och skydd.</a:t>
             </a:r>
           </a:p>
         </p:txBody>
@@ -6880,7 +6880,7 @@
                 <a:ea typeface="Calibri"/>
                 <a:cs typeface="Calibri"/>
               </a:rPr>
-              <a:t>Förutsättningar: Synlig kabelskada finns före kontrollen. Instrumentet har inte bedömts användbart.</a:t>
+              <a:t>Förutsättningar: Skadan syns innan kontrollen har börjat. Ingen har bedömt att provaren kan användas.</a:t>
             </a:r>
           </a:p>
         </p:txBody>
@@ -6937,7 +6937,7 @@
                 <a:ea typeface="Calibri"/>
                 <a:cs typeface="Calibri"/>
               </a:rPr>
-              <a:t>Arbetsgång: Ange hur instrumentet tas ur bruk och vilken förutsättning som måste återställas före kontrollen.</a:t>
+              <a:t>Arbetsgång: Ange hur provaren tas ur bruk och vad som krävs innan kontrollen kan göras.</a:t>
             </a:r>
           </a:p>
         </p:txBody>
@@ -9925,7 +9925,7 @@
                 <a:ea typeface="Calibri"/>
                 <a:cs typeface="Calibri"/>
               </a:rPr>
-              <a:t>Utrustningens dimensionering och användning måste passa anläggningen och den fastställda arbetsmetoden.</a:t>
+              <a:t>Jordningsutrustningen måste vara dimensionerad för anläggningen och användas enligt den fastställda metoden.</a:t>
             </a:r>
           </a:p>
         </p:txBody>
@@ -9982,7 +9982,7 @@
                 <a:ea typeface="Calibri"/>
                 <a:cs typeface="Calibri"/>
               </a:rPr>
-              <a:t>Förutsättningar: Högspänningsfallet är en dokumentationsövning. Ingen praktisk manöver ska utföras utifrån denna bild.</a:t>
+              <a:t>Förutsättningar: Högspänningsfallet är en övning i dokumentation. Inget får utföras i praktiken utifrån den här beskrivningen.</a:t>
             </a:r>
           </a:p>
         </p:txBody>
@@ -10039,7 +10039,7 @@
                 <a:ea typeface="Calibri"/>
                 <a:cs typeface="Calibri"/>
               </a:rPr>
-              <a:t>Arbetsgång: Ange minst två konkreta kompletteringar. Beskriv vad som måste verifieras, inte en egen manöverföljd.</a:t>
+              <a:t>Arbetsgång: Ange minst två konkreta tillägg. Beskriv vad som ska kontrolleras – inte hur du själv skulle manövrera.</a:t>
             </a:r>
           </a:p>
         </p:txBody>
@@ -10316,7 +10316,7 @@
                 <a:ea typeface="Calibri"/>
                 <a:cs typeface="Calibri"/>
               </a:rPr>
-              <a:t>En högspänningsberedning nämner ”jorda” utan objekt, utrustning eller ansvar. Ange två nödvändiga kompletteringar.</a:t>
+              <a:t>I en beredning för ett högspänningsarbete står det bara ”jorda”, utan objekt, utrustning eller ansvarig. Ange två saker som måste läggas till.</a:t>
             </a:r>
           </a:p>
         </p:txBody>
@@ -10649,7 +10649,7 @@
                 <a:ea typeface="Calibri"/>
                 <a:cs typeface="Calibri"/>
               </a:rPr>
-              <a:t>En UPS kan hålla delar spänningssatta eller ändra vilka delar som behöver frånskiljas.</a:t>
+              <a:t>En UPS kan hålla delar spänningssatta eller ändra vad som behöver frånskiljas.</a:t>
             </a:r>
           </a:p>
         </p:txBody>
@@ -10706,7 +10706,7 @@
                 <a:ea typeface="Calibri"/>
                 <a:cs typeface="Calibri"/>
               </a:rPr>
-              <a:t>Förutsättningar: En tidigare okänd UPS upptäcks under arbetet och saknas i beredningen.</a:t>
+              <a:t>Förutsättningar: En UPS som ingen kände till upptäcks under arbetet. Den finns inte med i beredningen.</a:t>
             </a:r>
           </a:p>
         </p:txBody>
@@ -10763,7 +10763,7 @@
                 <a:ea typeface="Calibri"/>
                 <a:cs typeface="Calibri"/>
               </a:rPr>
-              <a:t>Arbetsgång: Avgränsa berört arbete, kartlägg den nya källan och ange villkor för nytt startbesked.</a:t>
+              <a:t>Arbetsgång: Stoppa det berörda arbetet, ta reda på vad UPS:en matar och ange vad som krävs för ett nytt startbesked.</a:t>
             </a:r>
           </a:p>
         </p:txBody>
@@ -11040,7 +11040,7 @@
                 <a:ea typeface="Calibri"/>
                 <a:cs typeface="Calibri"/>
               </a:rPr>
-              <a:t>Under arbetet upptäcks en UPS som inte finns i beredningen. Vad bör ske med riskbedömningen?</a:t>
+              <a:t>Under arbetet upptäcker ni en UPS som inte finns med i beredningen. Vad ska hända med riskbedömningen?</a:t>
             </a:r>
           </a:p>
         </p:txBody>
@@ -11373,7 +11373,7 @@
                 <a:ea typeface="Calibri"/>
                 <a:cs typeface="Calibri"/>
               </a:rPr>
-              <a:t>Poängen är ett mått i den angivna övningsmatrisen. Siffrorna är bedömda skalvärden utan fysisk enhet.</a:t>
+              <a:t>Poängen gäller bara i den här matrisen. Siffrorna är uppskattningar och har ingen enhet.</a:t>
             </a:r>
           </a:p>
         </p:txBody>
@@ -11430,7 +11430,7 @@
                 <a:ea typeface="Calibri"/>
                 <a:cs typeface="Calibri"/>
               </a:rPr>
-              <a:t>Förutsättningar: Före: 3 och 4. Efter: 1 och 4. Ingen godkännandegräns är angiven.</a:t>
+              <a:t>Förutsättningar: Före: 3 och 4. Efter: 1 och 4. Det finns ingen gräns för vad som är godtagbart.</a:t>
             </a:r>
           </a:p>
         </p:txBody>
@@ -11487,7 +11487,7 @@
                 <a:ea typeface="Calibri"/>
                 <a:cs typeface="Calibri"/>
               </a:rPr>
-              <a:t>Arbetsgång: Multiplicera före och efter. Förklara varför lägre poäng inte bevisar att alla krav är uppfyllda.</a:t>
+              <a:t>Arbetsgång: Räkna poängen före och efter och förklara varför en lägre poäng inte bevisar att kraven är uppfyllda.</a:t>
             </a:r>
           </a:p>
         </p:txBody>
@@ -12278,7 +12278,7 @@
                 <a:ea typeface="Calibri"/>
                 <a:cs typeface="Calibri"/>
               </a:rPr>
-              <a:t>I en övningsmatris är sannolikhet 3 och konsekvens 4. Riskpoäng definieras som produkten. Efter åtgärd bedöms 1 och 4. Beräkna poängen och förklara begränsningen.</a:t>
+              <a:t>I en riskmatris för övningen är sannolikheten 3 och konsekvensen 4. Riskpoängen är produkten av de två. Efter en åtgärd bedöms värdena till 1 och 4. Beräkna poängen och förklara vad den inte säger.</a:t>
             </a:r>
           </a:p>
         </p:txBody>
@@ -12611,7 +12611,7 @@
                 <a:ea typeface="Calibri"/>
                 <a:cs typeface="Calibri"/>
               </a:rPr>
-              <a:t>En uppföljningsbar åtgärd behöver objekt, ansvarig, kontrollmetod och ett redovisat utfall.</a:t>
+              <a:t>För att en åtgärd ska kunna följas upp behövs objekt, ansvarig, kontrollmetod och ett redovisat resultat.</a:t>
             </a:r>
           </a:p>
         </p:txBody>
@@ -12668,7 +12668,7 @@
                 <a:ea typeface="Calibri"/>
                 <a:cs typeface="Calibri"/>
               </a:rPr>
-              <a:t>Förutsättningar: Den ursprungliga texten är ”kontrollera kabeln”. Exakt kabeltyp och metod finns ännu inte angivna.</a:t>
+              <a:t>Förutsättningar: Texten är ”kontrollera kabeln”. Kabeltyp och metod är inte angivna ännu.</a:t>
             </a:r>
           </a:p>
         </p:txBody>
@@ -12725,7 +12725,7 @@
                 <a:ea typeface="Calibri"/>
                 <a:cs typeface="Calibri"/>
               </a:rPr>
-              <a:t>Arbetsgång: Skriv en tydligare mall. Markera att tillämplig instruktion ska bestämma metod och godkännandekriterium.</a:t>
+              <a:t>Arbetsgång: Skriv en tydligare formulering och ange att den gällande instruktionen bestämmer metod och vad som är godkänt.</a:t>
             </a:r>
           </a:p>
         </p:txBody>
@@ -12944,7 +12944,7 @@
                 <a:ea typeface="Calibri"/>
                 <a:cs typeface="Calibri"/>
               </a:rPr>
-              <a:t>Åtgärdens verifiering</a:t>
+              <a:t>Kontroll av åtgärden</a:t>
             </a:r>
           </a:p>
         </p:txBody>
@@ -13002,7 +13002,7 @@
                 <a:ea typeface="Calibri"/>
                 <a:cs typeface="Calibri"/>
               </a:rPr>
-              <a:t>Riskraden säger ”kontrollera kabeln”. Skriv en mer användbar formulering med ansvar och resultat.</a:t>
+              <a:t>Riskraden säger ”kontrollera kabeln”. Skriv om den så att det framgår vem som ansvarar och vad resultatet ska bli.</a:t>
             </a:r>
           </a:p>
         </p:txBody>
@@ -13392,7 +13392,7 @@
                 <a:ea typeface="Calibri"/>
                 <a:cs typeface="Calibri"/>
               </a:rPr>
-              <a:t>Förutsättningar: Två matningar är identifierade men bara en verifierad. Arbetet planeras som arbete utan spänning.</a:t>
+              <a:t>Förutsättningar: Två matningar är kända, men bara den ena är kontrollerad. Arbetet planeras som arbete utan spänning.</a:t>
             </a:r>
           </a:p>
         </p:txBody>
@@ -13726,7 +13726,7 @@
                 <a:ea typeface="Calibri"/>
                 <a:cs typeface="Calibri"/>
               </a:rPr>
-              <a:t>En grupp har identifierat två matningar men kan bara verifiera en. PPE finns tillgänglig. Kan arbetet påbörjas som arbete utan spänning?</a:t>
+              <a:t>En grupp har hittat två matningar men kan bara kontrollera den ena. Skyddsutrustning finns. Kan arbetet börja som arbete utan spänning?</a:t>
             </a:r>
           </a:p>
         </p:txBody>

--- a/sjoskolan/vecka-42/aktuell/v42_03_Riskbedomning_och_skydd_elev.pptx
+++ b/sjoskolan/vecka-42/aktuell/v42_03_Riskbedomning_och_skydd_elev.pptx
@@ -3789,7 +3789,7 @@
                 <a:ea typeface="Calibri"/>
                 <a:cs typeface="Calibri"/>
               </a:rPr>
-              <a:t>Stöd till övning 1</a:t>
+              <a:t>Stöd till övning 3.1</a:t>
             </a:r>
           </a:p>
         </p:txBody>
@@ -4178,7 +4178,7 @@
                 <a:ea typeface="Calibri"/>
                 <a:cs typeface="Calibri"/>
               </a:rPr>
-              <a:t>Övning 1</a:t>
+              <a:t>Övning 3.1</a:t>
             </a:r>
           </a:p>
         </p:txBody>
@@ -4513,7 +4513,7 @@
                 <a:ea typeface="Calibri"/>
                 <a:cs typeface="Calibri"/>
               </a:rPr>
-              <a:t>Stöd till övning 2</a:t>
+              <a:t>Stöd till övning 3.2</a:t>
             </a:r>
           </a:p>
         </p:txBody>
@@ -4902,7 +4902,7 @@
                 <a:ea typeface="Calibri"/>
                 <a:cs typeface="Calibri"/>
               </a:rPr>
-              <a:t>Övning 2</a:t>
+              <a:t>Övning 3.2</a:t>
             </a:r>
           </a:p>
         </p:txBody>
@@ -5237,7 +5237,7 @@
                 <a:ea typeface="Calibri"/>
                 <a:cs typeface="Calibri"/>
               </a:rPr>
-              <a:t>Stöd till övning 3</a:t>
+              <a:t>Stöd till övning 3.3</a:t>
             </a:r>
           </a:p>
         </p:txBody>
@@ -5626,7 +5626,7 @@
                 <a:ea typeface="Calibri"/>
                 <a:cs typeface="Calibri"/>
               </a:rPr>
-              <a:t>Övning 3</a:t>
+              <a:t>Övning 3.3</a:t>
             </a:r>
           </a:p>
         </p:txBody>
@@ -5961,7 +5961,7 @@
                 <a:ea typeface="Calibri"/>
                 <a:cs typeface="Calibri"/>
               </a:rPr>
-              <a:t>Stöd till övning 4</a:t>
+              <a:t>Stöd till övning 3.4</a:t>
             </a:r>
           </a:p>
         </p:txBody>
@@ -6374,7 +6374,7 @@
                 <a:ea typeface="Calibri"/>
                 <a:cs typeface="Calibri"/>
               </a:rPr>
-              <a:t>Övning 4</a:t>
+              <a:t>Övning 3.4</a:t>
             </a:r>
           </a:p>
         </p:txBody>
@@ -6709,7 +6709,7 @@
                 <a:ea typeface="Calibri"/>
                 <a:cs typeface="Calibri"/>
               </a:rPr>
-              <a:t>Stöd till övning 5</a:t>
+              <a:t>Stöd till övning 3.5</a:t>
             </a:r>
           </a:p>
         </p:txBody>
@@ -7098,7 +7098,7 @@
                 <a:ea typeface="Calibri"/>
                 <a:cs typeface="Calibri"/>
               </a:rPr>
-              <a:t>Övning 5</a:t>
+              <a:t>Övning 3.5</a:t>
             </a:r>
           </a:p>
         </p:txBody>
@@ -9811,7 +9811,7 @@
                 <a:ea typeface="Calibri"/>
                 <a:cs typeface="Calibri"/>
               </a:rPr>
-              <a:t>Stöd till övning 6</a:t>
+              <a:t>Stöd till övning 3.6</a:t>
             </a:r>
           </a:p>
         </p:txBody>
@@ -10200,7 +10200,7 @@
                 <a:ea typeface="Calibri"/>
                 <a:cs typeface="Calibri"/>
               </a:rPr>
-              <a:t>Övning 6</a:t>
+              <a:t>Övning 3.6</a:t>
             </a:r>
           </a:p>
         </p:txBody>
@@ -10535,7 +10535,7 @@
                 <a:ea typeface="Calibri"/>
                 <a:cs typeface="Calibri"/>
               </a:rPr>
-              <a:t>Stöd till övning 7</a:t>
+              <a:t>Stöd till övning 3.7</a:t>
             </a:r>
           </a:p>
         </p:txBody>
@@ -10924,7 +10924,7 @@
                 <a:ea typeface="Calibri"/>
                 <a:cs typeface="Calibri"/>
               </a:rPr>
-              <a:t>Övning 7</a:t>
+              <a:t>Övning 3.7</a:t>
             </a:r>
           </a:p>
         </p:txBody>
@@ -11259,7 +11259,7 @@
                 <a:ea typeface="Calibri"/>
                 <a:cs typeface="Calibri"/>
               </a:rPr>
-              <a:t>Stöd till övning 8</a:t>
+              <a:t>Stöd till övning 3.8</a:t>
             </a:r>
           </a:p>
         </p:txBody>
@@ -12162,7 +12162,7 @@
                 <a:ea typeface="Calibri"/>
                 <a:cs typeface="Calibri"/>
               </a:rPr>
-              <a:t>Övning 8</a:t>
+              <a:t>Övning 3.8</a:t>
             </a:r>
           </a:p>
         </p:txBody>
@@ -12497,7 +12497,7 @@
                 <a:ea typeface="Calibri"/>
                 <a:cs typeface="Calibri"/>
               </a:rPr>
-              <a:t>Stöd till övning 9</a:t>
+              <a:t>Stöd till övning 3.9</a:t>
             </a:r>
           </a:p>
         </p:txBody>
@@ -12886,7 +12886,7 @@
                 <a:ea typeface="Calibri"/>
                 <a:cs typeface="Calibri"/>
               </a:rPr>
-              <a:t>Övning 9</a:t>
+              <a:t>Övning 3.9</a:t>
             </a:r>
           </a:p>
         </p:txBody>
@@ -13221,7 +13221,7 @@
                 <a:ea typeface="Calibri"/>
                 <a:cs typeface="Calibri"/>
               </a:rPr>
-              <a:t>Stöd till övning 10</a:t>
+              <a:t>Stöd till övning 3.10</a:t>
             </a:r>
           </a:p>
         </p:txBody>
@@ -13610,7 +13610,7 @@
                 <a:ea typeface="Calibri"/>
                 <a:cs typeface="Calibri"/>
               </a:rPr>
-              <a:t>Övning 10</a:t>
+              <a:t>Övning 3.10</a:t>
             </a:r>
           </a:p>
         </p:txBody>

--- a/sjoskolan/vecka-42/aktuell/v42_03_Riskbedomning_och_skydd_elev.pptx
+++ b/sjoskolan/vecka-42/aktuell/v42_03_Riskbedomning_och_skydd_elev.pptx
@@ -7992,7 +7992,7 @@
                 <a:ea typeface="Calibri"/>
                 <a:cs typeface="Calibri"/>
               </a:rPr>
-              <a:t>Teori och exempel följs av övning 6–10.</a:t>
+              <a:t>Teori och exempel följs av övning 3.6–3.10.</a:t>
             </a:r>
           </a:p>
           <a:p xmlns:a="http://schemas.openxmlformats.org/drawingml/2006/main">
@@ -11784,7 +11784,7 @@
                 <a:ea typeface="Calibri"/>
                 <a:cs typeface="Calibri"/>
               </a:rPr>
-              <a:t>15 min övning 1, 2, 4, 5 min återkoppling</a:t>
+              <a:t>15 min övning 3.1, 3.2 och 3.4, 5 min återkoppling</a:t>
             </a:r>
           </a:p>
         </p:txBody>
@@ -11898,7 +11898,7 @@
                 <a:ea typeface="Calibri"/>
                 <a:cs typeface="Calibri"/>
               </a:rPr>
-              <a:t>20 min teori och exempel, 15 min övning 6, 7, 8</a:t>
+              <a:t>20 min teori och exempel, 15 min övning 3.6, 3.7 och 3.8</a:t>
             </a:r>
           </a:p>
           <a:p xmlns:a="http://schemas.openxmlformats.org/drawingml/2006/main">

--- a/sjoskolan/vecka-42/aktuell/v42_03_Riskbedomning_och_skydd_elev.pptx
+++ b/sjoskolan/vecka-42/aktuell/v42_03_Riskbedomning_och_skydd_elev.pptx
@@ -8465,14 +8465,14 @@
       </p:sp>
       <p:pic xmlns:a="http://schemas.openxmlformats.org/drawingml/2006/main" xmlns:r="http://schemas.openxmlformats.org/officeDocument/2006/relationships">
         <p:nvPicPr>
-          <p:cNvPr id="9" name="Figur: Tre faser frånskilda; jordning och korts" descr="Tre faser frånskilda; jordning och kortslutning nära arbetsstället och synlig därifrån"/>
+          <p:cNvPr id="9" name="Figur: Frånskiljare med synligt brytställe; vid" descr="Frånskiljare med synligt brytställe; vid arbetsstället ett jordnings- och kortslutningsdon med klämmor på L1, L2 och L3 och jordledaren till jordskenan, som ansluts först och tas bort sist"/>
           <p:cNvPicPr>
             <a:picLocks noChangeAspect="1"/>
           </p:cNvPicPr>
           <p:nvPr/>
         </p:nvPicPr>
         <p:blipFill>
-          <a:blip r:embed="rId3"/>
+          <a:blip r:embed="rId5"/>
           <a:stretch>
             <a:fillRect/>
           </a:stretch>
@@ -8480,7 +8480,7 @@
         <p:spPr>
           <a:xfrm>
             <a:off x="4892040" y="1645920"/>
-            <a:ext cx="3886200" cy="3252383"/>
+            <a:ext cx="3886200" cy="1625419"/>
           </a:xfrm>
           <a:prstGeom prst="rect">
             <a:avLst/>
@@ -16637,14 +16637,14 @@
       </p:sp>
       <p:pic xmlns:a="http://schemas.openxmlformats.org/drawingml/2006/main" xmlns:r="http://schemas.openxmlformats.org/officeDocument/2006/relationships">
         <p:nvPicPr>
-          <p:cNvPr id="9" name="Figur: Prova, mät, prova: spänningsprovaren kon" descr="Prova, mät, prova: spänningsprovaren kontrolleras mot känd källa före och efter mätningen på objektet"/>
+          <p:cNvPr id="9" name="Figur: Frånskiljare i läge 0 med hänglås och sk" descr="Frånskiljare i läge 0 med hänglås och skylt (namn, datum, telefon); tvåpolig spänningsprovare mot de utgående plintarna L1, L2, L3 och PE: prova – mät – prova, mät mellan alla ledare och mot PE"/>
           <p:cNvPicPr>
             <a:picLocks noChangeAspect="1"/>
           </p:cNvPicPr>
           <p:nvPr/>
         </p:nvPicPr>
         <p:blipFill>
-          <a:blip r:embed="rId3"/>
+          <a:blip r:embed="rId5"/>
           <a:stretch>
             <a:fillRect/>
           </a:stretch>
@@ -16652,7 +16652,7 @@
         <p:spPr>
           <a:xfrm>
             <a:off x="4892040" y="1645920"/>
-            <a:ext cx="3886200" cy="3071293"/>
+            <a:ext cx="3886200" cy="1723470"/>
           </a:xfrm>
           <a:prstGeom prst="rect">
             <a:avLst/>

--- a/sjoskolan/vecka-42/aktuell/v42_03_Riskbedomning_och_skydd_elev.pptx
+++ b/sjoskolan/vecka-42/aktuell/v42_03_Riskbedomning_och_skydd_elev.pptx
@@ -4741,7 +4741,7 @@
                 <a:ea typeface="Calibri"/>
                 <a:cs typeface="Calibri"/>
               </a:rPr>
-              <a:t>Arbetsgång: Bygg en orsakskedja utan att framställa en antagen spänningssättning som observation.</a:t>
+              <a:t>Arbetsgång: Skriv kedjan fara → händelse → konsekvens. Skriv inte att kabeln är spänningssatt. Det vet du inte.</a:t>
             </a:r>
           </a:p>
         </p:txBody>
@@ -6132,7 +6132,7 @@
                 <a:ea typeface="Calibri"/>
                 <a:cs typeface="Calibri"/>
               </a:rPr>
-              <a:t>Förutsättningar: Skyddet mot återinkoppling i arbetsplanen är inte genomfört. Det finns bara en skylt.</a:t>
+              <a:t>Förutsättningar: Planen säger att brytaren ska låsas. Den är inte låst. Det sitter bara en skylt.</a:t>
             </a:r>
           </a:p>
         </p:txBody>
@@ -6766,7 +6766,7 @@
                 <a:ea typeface="Calibri"/>
                 <a:cs typeface="Calibri"/>
               </a:rPr>
-              <a:t>En skadad provare ger otillförlitliga förutsättningar</a:t>
+              <a:t>En skadad provare kan visa fel och ge dåligt skydd</a:t>
             </a:r>
           </a:p>
         </p:txBody>
@@ -9410,7 +9410,7 @@
                 <a:ea typeface="Calibri"/>
                 <a:cs typeface="Calibri"/>
               </a:rPr>
-              <a:t>En övningsmatris anger sannolikhet 4, konsekvens 2. Efter åtgärd bedöms sannolikheten till 2.</a:t>
+              <a:t>En övningsmatris anger sannolikhet 5, konsekvens 3. Efter åtgärd bedöms sannolikheten till 2.</a:t>
             </a:r>
           </a:p>
         </p:txBody>
@@ -9524,7 +9524,7 @@
                 <a:ea typeface="Calibri"/>
                 <a:cs typeface="Calibri"/>
               </a:rPr>
-              <a:t>1. Före: 4 · 2 = 8.</a:t>
+              <a:t>1. Före: 5 · 3 = 15.</a:t>
             </a:r>
           </a:p>
           <a:p xmlns:a="http://schemas.openxmlformats.org/drawingml/2006/main">
@@ -9547,7 +9547,7 @@
                 <a:ea typeface="Calibri"/>
                 <a:cs typeface="Calibri"/>
               </a:rPr>
-              <a:t>2. Efter: 2 · 2 = 4.</a:t>
+              <a:t>2. Efter: 2 · 3 = 6.</a:t>
             </a:r>
           </a:p>
           <a:p xmlns:a="http://schemas.openxmlformats.org/drawingml/2006/main">
@@ -9570,7 +9570,7 @@
                 <a:ea typeface="Calibri"/>
                 <a:cs typeface="Calibri"/>
               </a:rPr>
-              <a:t>3. Poängen sjunker i denna matris. Det betyder inte att risken har halverats.</a:t>
+              <a:t>3. Poängen sjunker i denna matris. Det säger inte hur mycket säkrare arbetet har blivit.</a:t>
             </a:r>
           </a:p>
         </p:txBody>
@@ -9691,14 +9691,14 @@
       </p:sp>
       <p:pic xmlns:a="http://schemas.openxmlformats.org/drawingml/2006/main" xmlns:r="http://schemas.openxmlformats.org/officeDocument/2006/relationships">
         <p:nvPicPr>
-          <p:cNvPr id="16" name="Figur: Riskmatris fem gånger fem med poäng; för" descr="Riskmatris fem gånger fem med poäng; före åtgärd sannolikhet 4 och konsekvens 2, efter åtgärd 2 och 2"/>
+          <p:cNvPr id="16" name="Figur: Riskmatris fem gånger fem med poäng; för" descr="Riskmatris fem gånger fem med poäng; före åtgärd sannolikhet 5 och konsekvens 3, efter åtgärd 2 och 3"/>
           <p:cNvPicPr>
             <a:picLocks noChangeAspect="1"/>
           </p:cNvPicPr>
           <p:nvPr/>
         </p:nvPicPr>
         <p:blipFill>
-          <a:blip r:embed="rId3"/>
+          <a:blip r:embed="rId4"/>
           <a:stretch>
             <a:fillRect/>
           </a:stretch>
@@ -9706,7 +9706,7 @@
         <p:spPr>
           <a:xfrm>
             <a:off x="4892040" y="1645920"/>
-            <a:ext cx="3886200" cy="3886200"/>
+            <a:ext cx="3886200" cy="4067290"/>
           </a:xfrm>
           <a:prstGeom prst="rect">
             <a:avLst/>
@@ -12278,7 +12278,7 @@
                 <a:ea typeface="Calibri"/>
                 <a:cs typeface="Calibri"/>
               </a:rPr>
-              <a:t>I en riskmatris för övningen är sannolikheten 3 och konsekvensen 4. Riskpoängen är produkten av de två. Efter en åtgärd bedöms värdena till 1 och 4. Beräkna poängen och förklara vad den inte säger.</a:t>
+              <a:t>I en riskmatris är sannolikheten 3 och konsekvensen 4. Riskpoäng = sannolikhet · konsekvens. Efter en åtgärd är sannolikheten 1 och konsekvensen 4. a) Räkna poängen före och efter. b) Vad säger poängen inte?</a:t>
             </a:r>
           </a:p>
         </p:txBody>
@@ -12725,7 +12725,7 @@
                 <a:ea typeface="Calibri"/>
                 <a:cs typeface="Calibri"/>
               </a:rPr>
-              <a:t>Arbetsgång: Skriv en tydligare formulering och ange att den gällande instruktionen bestämmer metod och vad som är godkänt.</a:t>
+              <a:t>Arbetsgång: Skriv om raden så att den säger vem, vad och när. Skriv också var resultatet ska stå. Instruktionen säger hur kontrollen görs.</a:t>
             </a:r>
           </a:p>
         </p:txBody>
@@ -13335,7 +13335,7 @@
                 <a:ea typeface="Calibri"/>
                 <a:cs typeface="Calibri"/>
               </a:rPr>
-              <a:t>Jämför det som är verifierat med det som den valda arbetsmetoden kräver.</a:t>
+              <a:t>Arbete utan spänning kräver att alla matningar är brutna och kontrollerade.</a:t>
             </a:r>
           </a:p>
         </p:txBody>
@@ -13449,7 +13449,7 @@
                 <a:ea typeface="Calibri"/>
                 <a:cs typeface="Calibri"/>
               </a:rPr>
-              <a:t>Arbetsgång: Jämför kända kontroller med arbetsmetodens förutsättningar. Ange vad som måste klarläggas före start.</a:t>
+              <a:t>Arbetsgång: Hur många av matningarna är kontrollerade? Vad kan skyddsutrustning göra, och vad kan den inte göra?</a:t>
             </a:r>
           </a:p>
         </p:txBody>

--- a/sjoskolan/vecka-42/aktuell/v42_03_Riskbedomning_och_skydd_elev.pptx
+++ b/sjoskolan/vecka-42/aktuell/v42_03_Riskbedomning_och_skydd_elev.pptx
@@ -3653,9 +3653,64 @@
           </a:p>
         </p:txBody>
       </p:sp>
+      <p:sp>
+        <p:nvSpPr>
+          <p:cNvPr id="8" name="Dag: Fredag 16 oktober"/>
+          <p:cNvSpPr/>
+          <p:nvPr/>
+        </p:nvSpPr>
+        <p:spPr>
+          <a:xfrm>
+            <a:off x="548640" y="411480"/>
+            <a:ext cx="2944368" cy="438912"/>
+          </a:xfrm>
+          <a:prstGeom prst="roundRect">
+            <a:avLst>
+              <a:gd name="adj" fmla="val 18000"/>
+            </a:avLst>
+          </a:prstGeom>
+          <a:solidFill>
+            <a:srgbClr val="B5179E"/>
+          </a:solidFill>
+          <a:ln>
+            <a:noFill/>
+          </a:ln>
+          <a:effectLst/>
+        </p:spPr>
+        <p:style>
+          <a:lnRef idx="1">
+            <a:schemeClr val="accent1"/>
+          </a:lnRef>
+          <a:fillRef idx="3">
+            <a:schemeClr val="accent1"/>
+          </a:fillRef>
+          <a:effectRef idx="2">
+            <a:schemeClr val="accent1"/>
+          </a:effectRef>
+          <a:fontRef idx="minor">
+            <a:schemeClr val="lt1"/>
+          </a:fontRef>
+        </p:style>
+        <p:txBody>
+          <a:bodyPr rtlCol="0" anchor="ctr" lIns="109728" rIns="109728"/>
+          <a:lstStyle/>
+          <a:p>
+            <a:pPr algn="ctr"/>
+            <a:r>
+              <a:rPr sz="1800" b="1" i="0">
+                <a:solidFill>
+                  <a:srgbClr val="FFFFFF"/>
+                </a:solidFill>
+                <a:latin typeface="Calibri"/>
+              </a:rPr>
+              <a:t>Fredag 16 oktober</a:t>
+            </a:r>
+          </a:p>
+        </p:txBody>
+      </p:sp>
       <p:pic>
         <p:nvPicPr>
-          <p:cNvPr id="8" name="Picture 7" descr="sidfot.jpg"/>
+          <p:cNvPr id="9" name="Picture 8" descr="sidfot.jpg"/>
           <p:cNvPicPr>
             <a:picLocks noChangeAspect="1"/>
           </p:cNvPicPr>
@@ -3679,7 +3734,7 @@
       </p:pic>
       <p:sp>
         <p:nvSpPr>
-          <p:cNvPr id="9" name="TextBox 8"/>
+          <p:cNvPr id="10" name="TextBox 9"/>
           <p:cNvSpPr txBox="1"/>
           <p:nvPr/>
         </p:nvSpPr>
@@ -3721,7 +3776,7 @@
       </p:sp>
       <p:sp>
         <p:nvSpPr>
-          <p:cNvPr id="10" name="TextBox 9"/>
+          <p:cNvPr id="11" name="TextBox 10"/>
           <p:cNvSpPr txBox="1"/>
           <p:nvPr/>
         </p:nvSpPr>
@@ -8400,7 +8455,7 @@
                 </a:solidFill>
                 <a:latin typeface="Calibri"/>
               </a:rPr>
-              <a:t>1. Läs del 3 på webben. Tryck på ”Jag har läst del 3” längst ned på sidan.</a:t>
+              <a:t>1. Läs del 3. Tryck på ”Jag har läst del 3” längst ned på sidan.</a:t>
             </a:r>
           </a:p>
           <a:p>
@@ -8419,7 +8474,7 @@
                 </a:solidFill>
                 <a:latin typeface="Calibri"/>
               </a:rPr>
-              <a:t>2. Gör övning 3.6–3.10 på delsidan och labben Välj CAT-klass.</a:t>
+              <a:t>2. Gör övning 3.6–3.10 på delsidan. Ledtrådar och facit finns där.</a:t>
             </a:r>
           </a:p>
           <a:p>
@@ -8438,7 +8493,26 @@
                 </a:solidFill>
                 <a:latin typeface="Calibri"/>
               </a:rPr>
-              <a:t>3. Gör klart inlämningen i formuläret. Ladda ner PDF-filen och lämna in den i Google Classroom.</a:t>
+              <a:t>3. Gör labben Välj CAT-klass i Multimeterlabbet.</a:t>
+            </a:r>
+          </a:p>
+          <a:p>
+            <a:pPr algn="l">
+              <a:lnSpc>
+                <a:spcPct val="108000"/>
+              </a:lnSpc>
+              <a:spcAft>
+                <a:spcPts val="1400"/>
+              </a:spcAft>
+            </a:pPr>
+            <a:r>
+              <a:rPr sz="2000" b="0" i="0">
+                <a:solidFill>
+                  <a:srgbClr val="111111"/>
+                </a:solidFill>
+                <a:latin typeface="Calibri"/>
+              </a:rPr>
+              <a:t>4. Gör klart inlämningen. Ladda ner PDF-filen och lämna in den i Google Classroom.</a:t>
             </a:r>
           </a:p>
           <a:p>
@@ -8457,7 +8531,7 @@
                 </a:solidFill>
                 <a:latin typeface="Calibri"/>
               </a:rPr>
-              <a:t>Sista dag: söndag 18 oktober. Nästa vecka: vecka 43, Komponenter och skydd.</a:t>
+              <a:t>Inlämningen senast söndag 18 oktober. Nästa vecka: vecka 43, Komponenter och skydd.</a:t>
             </a:r>
           </a:p>
         </p:txBody>

--- a/sjoskolan/vecka-42/aktuell/v42_03_Riskbedomning_och_skydd_elev.pptx
+++ b/sjoskolan/vecka-42/aktuell/v42_03_Riskbedomning_och_skydd_elev.pptx
@@ -7290,7 +7290,7 @@
                 </a:solidFill>
                 <a:latin typeface="Calibri"/>
               </a:rPr>
-              <a:t>Lämna riskbedömningen senast söndag 18 oktober. Ange arbetsgräns, faror, åtgärder, ansvar, kvarstående risk och kontrollerad regelhänvisning.</a:t>
+              <a:t>Lämna riskbedömningen i inlämningen senast i dag, fredag 16 oktober. Ange arbetsgräns, faror, åtgärder, ansvar, kvarstående risk och kontrollerad regelhänvisning.</a:t>
             </a:r>
           </a:p>
         </p:txBody>
@@ -8512,7 +8512,7 @@
                 </a:solidFill>
                 <a:latin typeface="Calibri"/>
               </a:rPr>
-              <a:t>4. Gör klart inlämningen. Ladda ner PDF-filen och lämna in den i Google Classroom.</a:t>
+              <a:t>4. Gör klart inlämningen i dag. Ladda ner PDF-filen och lämna in den i Google Classroom.</a:t>
             </a:r>
           </a:p>
           <a:p>
@@ -8531,7 +8531,7 @@
                 </a:solidFill>
                 <a:latin typeface="Calibri"/>
               </a:rPr>
-              <a:t>Inlämningen senast söndag 18 oktober. Nästa vecka: vecka 43, Komponenter och skydd.</a:t>
+              <a:t>Inlämningen senast i dag, fredag 16 oktober. Nästa vecka: vecka 43, Komponenter och skydd.</a:t>
             </a:r>
           </a:p>
         </p:txBody>
